--- a/test_5_lor.pptx
+++ b/test_5_lor.pptx
@@ -3112,6 +3112,10 @@
             </a:stretch>
           </a:blipFill>
         </p:spPr>
+        <p:txBody>
+          <a:bodyPr/>
+          <a:p/>
+        </p:txBody>
       </p:sp>
       <p:sp>
         <p:nvSpPr>
@@ -3164,6 +3168,10 @@
             </a:stretch>
           </a:blipFill>
         </p:spPr>
+        <p:txBody>
+          <a:bodyPr/>
+          <a:p/>
+        </p:txBody>
       </p:sp>
       <p:grpSp>
         <p:nvGrpSpPr>
@@ -3887,6 +3895,10 @@
             </a:stretch>
           </a:blipFill>
         </p:spPr>
+        <p:txBody>
+          <a:bodyPr/>
+          <a:p/>
+        </p:txBody>
       </p:sp>
       <p:sp>
         <p:nvSpPr>
@@ -3939,6 +3951,10 @@
             </a:stretch>
           </a:blipFill>
         </p:spPr>
+        <p:txBody>
+          <a:bodyPr/>
+          <a:p/>
+        </p:txBody>
       </p:sp>
       <p:sp>
         <p:nvSpPr>
@@ -3991,6 +4007,10 @@
             </a:stretch>
           </a:blipFill>
         </p:spPr>
+        <p:txBody>
+          <a:bodyPr/>
+          <a:p/>
+        </p:txBody>
       </p:sp>
       <p:sp>
         <p:nvSpPr>
@@ -4043,6 +4063,10 @@
             </a:stretch>
           </a:blipFill>
         </p:spPr>
+        <p:txBody>
+          <a:bodyPr/>
+          <a:p/>
+        </p:txBody>
       </p:sp>
       <p:sp>
         <p:nvSpPr>
@@ -4095,6 +4119,10 @@
             </a:stretch>
           </a:blipFill>
         </p:spPr>
+        <p:txBody>
+          <a:bodyPr/>
+          <a:p/>
+        </p:txBody>
       </p:sp>
       <p:grpSp>
         <p:nvGrpSpPr>
@@ -4918,56 +4946,34 @@
               <a:lnSpc>
                 <a:spcPts val="1425"/>
               </a:lnSpc>
+              <a:defRPr/>
             </a:pPr>
             <a:r>
-              <a:rPr lang="en-US" sz="909">
-                <a:solidFill>
-                  <a:srgbClr val="000000"/>
-                </a:solidFill>
-                <a:latin typeface="Arial"/>
-                <a:ea typeface="Arial"/>
-                <a:cs typeface="Arial"/>
-                <a:sym typeface="Arial"/>
-              </a:rPr>
               <a:t>BEST REGARDS,</a:t>
             </a:r>
           </a:p>
           <a:p>
-            <a:pPr algn="l">
-              <a:lnSpc>
-                <a:spcPts val="1425"/>
-              </a:lnSpc>
+            <a:pPr>
+              <a:defRPr/>
             </a:pPr>
             <a:r>
-              <a:rPr lang="en-US" sz="909">
-                <a:solidFill>
-                  <a:srgbClr val="000000"/>
-                </a:solidFill>
-                <a:latin typeface="Arial"/>
-                <a:ea typeface="Arial"/>
-                <a:cs typeface="Arial"/>
-                <a:sym typeface="Arial"/>
-              </a:rPr>
-              <a:t>KARTHIKEYAN SUNDHARESAN, HR TEAM HEAD,</a:t>
-            </a:r>
-          </a:p>
-          <a:p>
-            <a:pPr algn="l">
-              <a:lnSpc>
-                <a:spcPts val="1425"/>
-              </a:lnSpc>
+              <a:t>KARTHIKEYAN SUNDHARESAN,</a:t>
+            </a:r>
+          </a:p>
+          <a:p>
+            <a:pPr>
+              <a:defRPr/>
             </a:pPr>
             <a:r>
-              <a:rPr lang="en-US" sz="909">
-                <a:solidFill>
-                  <a:srgbClr val="000000"/>
-                </a:solidFill>
-                <a:latin typeface="Arial"/>
-                <a:ea typeface="Arial"/>
-                <a:cs typeface="Arial"/>
-                <a:sym typeface="Arial"/>
-              </a:rPr>
-              <a:t>COPTER CODE,</a:t>
+              <a:t>HR TEAM HEAD,</a:t>
+            </a:r>
+          </a:p>
+          <a:p>
+            <a:pPr>
+              <a:defRPr/>
+            </a:pPr>
+            <a:r>
+              <a:t>COPTER CODE.</a:t>
             </a:r>
           </a:p>
         </p:txBody>

--- a/test_5_lor.pptx
+++ b/test_5_lor.pptx
@@ -4929,7 +4929,7 @@
         </p:nvSpPr>
         <p:spPr>
           <a:xfrm>
-            <a:off x="337309" y="9248918"/>
+            <a:off x="337309" y="9111758"/>
             <a:ext cx="1721863" cy="910001"/>
           </a:xfrm>
           <a:prstGeom prst="rect">

--- a/test_5_lor.pptx
+++ b/test_5_lor.pptx
@@ -4559,7 +4559,7 @@
         </p:nvSpPr>
         <p:spPr>
           <a:xfrm>
-            <a:off x="337185" y="10428105"/>
+            <a:off x="337185" y="10424160"/>
             <a:ext cx="1277270" cy="176395"/>
           </a:xfrm>
           <a:prstGeom prst="rect">
@@ -4698,7 +4698,7 @@
         </p:nvSpPr>
         <p:spPr>
           <a:xfrm>
-            <a:off x="2886154" y="10441265"/>
+            <a:off x="2886154" y="10424160"/>
             <a:ext cx="1784191" cy="200662"/>
           </a:xfrm>
           <a:prstGeom prst="rect">
@@ -4739,7 +4739,7 @@
         </p:nvSpPr>
         <p:spPr>
           <a:xfrm>
-            <a:off x="5523648" y="10441265"/>
+            <a:off x="5523648" y="10424160"/>
             <a:ext cx="1658144" cy="200662"/>
           </a:xfrm>
           <a:prstGeom prst="rect">
@@ -4929,8 +4929,8 @@
         </p:nvSpPr>
         <p:spPr>
           <a:xfrm>
-            <a:off x="337309" y="9111758"/>
-            <a:ext cx="1721863" cy="910001"/>
+            <a:off x="337309" y="9244584"/>
+            <a:ext cx="2560320" cy="910001"/>
           </a:xfrm>
           <a:prstGeom prst="rect">
             <a:avLst/>
@@ -4946,33 +4946,37 @@
               <a:lnSpc>
                 <a:spcPts val="1425"/>
               </a:lnSpc>
-              <a:defRPr/>
+              <a:defRPr sz="909"/>
             </a:pPr>
             <a:r>
+              <a:rPr sz="909"/>
               <a:t>BEST REGARDS,</a:t>
             </a:r>
           </a:p>
           <a:p>
             <a:pPr>
-              <a:defRPr/>
+              <a:defRPr sz="909"/>
             </a:pPr>
             <a:r>
+              <a:rPr sz="909"/>
               <a:t>KARTHIKEYAN SUNDHARESAN,</a:t>
             </a:r>
           </a:p>
           <a:p>
             <a:pPr>
-              <a:defRPr/>
+              <a:defRPr sz="909"/>
             </a:pPr>
             <a:r>
+              <a:rPr sz="909"/>
               <a:t>HR TEAM HEAD,</a:t>
             </a:r>
           </a:p>
           <a:p>
             <a:pPr>
-              <a:defRPr/>
+              <a:defRPr sz="909"/>
             </a:pPr>
             <a:r>
+              <a:rPr sz="909"/>
               <a:t>COPTER CODE.</a:t>
             </a:r>
           </a:p>
